--- a/dist/초5/사회·역사/권리와생활/초5_사회·역사_권리와생활_02_법과규칙_학생용.pptx
+++ b/dist/초5/사회·역사/권리와생활/초5_사회·역사_권리와생활_02_법과규칙_학생용.pptx
@@ -119,20 +119,20 @@
   <p:extLst>
     <p:ext uri="{521415D9-36F7-43E2-AB2F-B90AF26B5E84}">
       <p14:sectionLst xmlns:p14="http://schemas.microsoft.com/office/powerpoint/2010/main">
-        <p14:section name="도입" id="{d1a2f205-6779-5e6c-0843-87310c647bc9}">
+        <p14:section name="도입" id="{fa5c4703-10dc-6636-6ff4-9257f8da6497}">
           <p14:sldIdLst>
             <p14:sldId id="256"/>
             <p14:sldId id="257"/>
           </p14:sldIdLst>
         </p14:section>
-        <p14:section name="개념" id="{5ef19fe4-6ade-70f7-b68e-805671f27699}">
+        <p14:section name="개념" id="{a5443598-9be8-fc39-511c-7c22d843152d}">
           <p14:sldIdLst>
             <p14:sldId id="258"/>
             <p14:sldId id="261"/>
             <p14:sldId id="262"/>
           </p14:sldIdLst>
         </p14:section>
-        <p14:section name="연습" id="{dcd9cbeb-cc8e-33fb-7e90-ebb03093887a}">
+        <p14:section name="연습" id="{bebdb2c9-b9a5-e011-0752-efc76dcfede8}">
           <p14:sldIdLst>
             <p14:sldId id="259"/>
             <p14:sldId id="260"/>
@@ -140,24 +140,24 @@
             <p14:sldId id="264"/>
           </p14:sldIdLst>
         </p14:section>
-        <p14:section name="개념" id="{9892e98f-73e2-57ae-742b-947c31cc3836}">
+        <p14:section name="개념" id="{8b953b07-3779-15c4-57b4-f1395ce1457a}">
           <p14:sldIdLst/>
         </p14:section>
-        <p14:section name="연습" id="{6c7b9ade-6812-a8d4-f839-b94eb9a0a2a8}">
+        <p14:section name="연습" id="{3c004454-afe0-448e-507a-f6cac611e485}">
           <p14:sldIdLst/>
         </p14:section>
-        <p14:section name="확인" id="{b8cdb76c-8b60-256b-d17e-a5eeb063aaf3}">
+        <p14:section name="확인" id="{04f4c64d-6771-933b-3b5c-4650361a7617}">
           <p14:sldIdLst>
             <p14:sldId id="265"/>
             <p14:sldId id="266"/>
           </p14:sldIdLst>
         </p14:section>
-        <p14:section name="정리" id="{e29c3e18-0486-25fa-c37f-3f7f6719076e}">
+        <p14:section name="정리" id="{69e81fe0-a1f2-f501-a23d-6e63c1f6f548}">
           <p14:sldIdLst>
             <p14:sldId id="267"/>
           </p14:sldIdLst>
         </p14:section>
-        <p14:section name="보충" id="{fec0c623-7ce0-af7d-ac22-a34429394e7f}">
+        <p14:section name="보충" id="{1a21f747-6925-c1c4-2ed0-fc0fd366b077}">
           <p14:sldIdLst>
             <p14:sldId id="268"/>
           </p14:sldIdLst>
